--- a/Academic Documents/Powerpoint wkg/Mid project Update - Dave v1.2 15-09.pptx
+++ b/Academic Documents/Powerpoint wkg/Mid project Update - Dave v1.2 15-09.pptx
@@ -125,12 +125,20 @@
 </p:presentation>
 </file>
 
+<file path=ppt/revisionInfo.xml><?xml version="1.0" encoding="utf-8"?>
+<p1510:revInfo xmlns:a="http://schemas.openxmlformats.org/drawingml/2006/main" xmlns:r="http://schemas.openxmlformats.org/officeDocument/2006/relationships" xmlns:p1510="http://schemas.microsoft.com/office/powerpoint/2015/10/main">
+  <p1510:revLst>
+    <p1510:client id="{49A048CA-DBD9-4208-A716-35D191BD64DB}" v="9" dt="2026-09-15T01:40:19.820"/>
+  </p1510:revLst>
+</p1510:revInfo>
+</file>
+
 <file path=ppt/changesInfos/changesInfo1.xml><?xml version="1.0" encoding="utf-8"?>
 <pc:chgInfo xmlns:a="http://schemas.openxmlformats.org/drawingml/2006/main" xmlns:r="http://schemas.openxmlformats.org/officeDocument/2006/relationships" xmlns:ac="http://schemas.microsoft.com/office/drawing/2013/main/command" xmlns:pc="http://schemas.microsoft.com/office/powerpoint/2013/main/command">
   <pc:docChgLst>
     <pc:chgData name="Dave Sushames" userId="ce71797e-895c-47df-af8e-c160254d5cef" providerId="ADAL" clId="{067FCE3D-3D41-4548-936F-F0A348C85C95}"/>
     <pc:docChg chg="undo custSel modSld">
-      <pc:chgData name="Dave Sushames" userId="ce71797e-895c-47df-af8e-c160254d5cef" providerId="ADAL" clId="{067FCE3D-3D41-4548-936F-F0A348C85C95}" dt="2026-09-14T23:52:20.503" v="275" actId="255"/>
+      <pc:chgData name="Dave Sushames" userId="ce71797e-895c-47df-af8e-c160254d5cef" providerId="ADAL" clId="{067FCE3D-3D41-4548-936F-F0A348C85C95}" dt="2026-09-15T01:44:29.560" v="789" actId="1076"/>
       <pc:docMkLst>
         <pc:docMk/>
       </pc:docMkLst>
@@ -173,13 +181,13 @@
         </pc:spChg>
       </pc:sldChg>
       <pc:sldChg chg="modSp mod">
-        <pc:chgData name="Dave Sushames" userId="ce71797e-895c-47df-af8e-c160254d5cef" providerId="ADAL" clId="{067FCE3D-3D41-4548-936F-F0A348C85C95}" dt="2026-09-14T23:50:50.603" v="249" actId="255"/>
+        <pc:chgData name="Dave Sushames" userId="ce71797e-895c-47df-af8e-c160254d5cef" providerId="ADAL" clId="{067FCE3D-3D41-4548-936F-F0A348C85C95}" dt="2026-09-15T01:37:48.603" v="690" actId="20577"/>
         <pc:sldMkLst>
           <pc:docMk/>
           <pc:sldMk cId="1717019194" sldId="258"/>
         </pc:sldMkLst>
         <pc:spChg chg="mod">
-          <ac:chgData name="Dave Sushames" userId="ce71797e-895c-47df-af8e-c160254d5cef" providerId="ADAL" clId="{067FCE3D-3D41-4548-936F-F0A348C85C95}" dt="2026-09-14T23:50:50.603" v="249" actId="255"/>
+          <ac:chgData name="Dave Sushames" userId="ce71797e-895c-47df-af8e-c160254d5cef" providerId="ADAL" clId="{067FCE3D-3D41-4548-936F-F0A348C85C95}" dt="2026-09-15T01:37:48.603" v="690" actId="20577"/>
           <ac:spMkLst>
             <pc:docMk/>
             <pc:sldMk cId="1717019194" sldId="258"/>
@@ -188,13 +196,21 @@
         </pc:spChg>
       </pc:sldChg>
       <pc:sldChg chg="modSp mod">
-        <pc:chgData name="Dave Sushames" userId="ce71797e-895c-47df-af8e-c160254d5cef" providerId="ADAL" clId="{067FCE3D-3D41-4548-936F-F0A348C85C95}" dt="2026-09-14T23:50:57.528" v="250" actId="108"/>
+        <pc:chgData name="Dave Sushames" userId="ce71797e-895c-47df-af8e-c160254d5cef" providerId="ADAL" clId="{067FCE3D-3D41-4548-936F-F0A348C85C95}" dt="2026-09-15T01:38:03.171" v="692" actId="20577"/>
         <pc:sldMkLst>
           <pc:docMk/>
           <pc:sldMk cId="3755520435" sldId="259"/>
         </pc:sldMkLst>
         <pc:spChg chg="mod">
-          <ac:chgData name="Dave Sushames" userId="ce71797e-895c-47df-af8e-c160254d5cef" providerId="ADAL" clId="{067FCE3D-3D41-4548-936F-F0A348C85C95}" dt="2026-09-14T23:50:57.528" v="250" actId="108"/>
+          <ac:chgData name="Dave Sushames" userId="ce71797e-895c-47df-af8e-c160254d5cef" providerId="ADAL" clId="{067FCE3D-3D41-4548-936F-F0A348C85C95}" dt="2026-09-15T01:38:03.171" v="692" actId="20577"/>
+          <ac:spMkLst>
+            <pc:docMk/>
+            <pc:sldMk cId="3755520435" sldId="259"/>
+            <ac:spMk id="2" creationId="{20C5FEAD-9459-4F61-E636-B0591191D4E6}"/>
+          </ac:spMkLst>
+        </pc:spChg>
+        <pc:spChg chg="mod">
+          <ac:chgData name="Dave Sushames" userId="ce71797e-895c-47df-af8e-c160254d5cef" providerId="ADAL" clId="{067FCE3D-3D41-4548-936F-F0A348C85C95}" dt="2026-09-15T01:36:39.947" v="682" actId="20577"/>
           <ac:spMkLst>
             <pc:docMk/>
             <pc:sldMk cId="3755520435" sldId="259"/>
@@ -217,29 +233,61 @@
           </ac:spMkLst>
         </pc:spChg>
       </pc:sldChg>
-      <pc:sldChg chg="modSp mod">
-        <pc:chgData name="Dave Sushames" userId="ce71797e-895c-47df-af8e-c160254d5cef" providerId="ADAL" clId="{067FCE3D-3D41-4548-936F-F0A348C85C95}" dt="2026-09-14T23:52:20.503" v="275" actId="255"/>
+      <pc:sldChg chg="addSp delSp modSp mod">
+        <pc:chgData name="Dave Sushames" userId="ce71797e-895c-47df-af8e-c160254d5cef" providerId="ADAL" clId="{067FCE3D-3D41-4548-936F-F0A348C85C95}" dt="2026-09-15T01:44:29.560" v="789" actId="1076"/>
         <pc:sldMkLst>
           <pc:docMk/>
           <pc:sldMk cId="68356929" sldId="261"/>
         </pc:sldMkLst>
         <pc:spChg chg="mod">
-          <ac:chgData name="Dave Sushames" userId="ce71797e-895c-47df-af8e-c160254d5cef" providerId="ADAL" clId="{067FCE3D-3D41-4548-936F-F0A348C85C95}" dt="2026-09-14T23:52:20.503" v="275" actId="255"/>
+          <ac:chgData name="Dave Sushames" userId="ce71797e-895c-47df-af8e-c160254d5cef" providerId="ADAL" clId="{067FCE3D-3D41-4548-936F-F0A348C85C95}" dt="2026-09-15T01:38:17.355" v="695" actId="20577"/>
+          <ac:spMkLst>
+            <pc:docMk/>
+            <pc:sldMk cId="68356929" sldId="261"/>
+            <ac:spMk id="2" creationId="{4AC5CB6E-FD33-4419-FD29-5EB30403054C}"/>
+          </ac:spMkLst>
+        </pc:spChg>
+        <pc:spChg chg="mod">
+          <ac:chgData name="Dave Sushames" userId="ce71797e-895c-47df-af8e-c160254d5cef" providerId="ADAL" clId="{067FCE3D-3D41-4548-936F-F0A348C85C95}" dt="2026-09-15T01:21:08.144" v="343" actId="20577"/>
           <ac:spMkLst>
             <pc:docMk/>
             <pc:sldMk cId="68356929" sldId="261"/>
             <ac:spMk id="3" creationId="{F342F351-5F23-6D92-03AC-5C25C11D2796}"/>
           </ac:spMkLst>
         </pc:spChg>
+        <pc:picChg chg="add del mod">
+          <ac:chgData name="Dave Sushames" userId="ce71797e-895c-47df-af8e-c160254d5cef" providerId="ADAL" clId="{067FCE3D-3D41-4548-936F-F0A348C85C95}" dt="2026-09-15T01:44:23.131" v="785" actId="478"/>
+          <ac:picMkLst>
+            <pc:docMk/>
+            <pc:sldMk cId="68356929" sldId="261"/>
+            <ac:picMk id="5" creationId="{2C414588-8473-6356-1C63-2E6EA99CF0E4}"/>
+          </ac:picMkLst>
+        </pc:picChg>
+        <pc:picChg chg="add mod">
+          <ac:chgData name="Dave Sushames" userId="ce71797e-895c-47df-af8e-c160254d5cef" providerId="ADAL" clId="{067FCE3D-3D41-4548-936F-F0A348C85C95}" dt="2026-09-15T01:44:29.560" v="789" actId="1076"/>
+          <ac:picMkLst>
+            <pc:docMk/>
+            <pc:sldMk cId="68356929" sldId="261"/>
+            <ac:picMk id="7" creationId="{257739DE-0FAB-97D0-0E34-5C4922963DA3}"/>
+          </ac:picMkLst>
+        </pc:picChg>
       </pc:sldChg>
       <pc:sldChg chg="modSp mod">
-        <pc:chgData name="Dave Sushames" userId="ce71797e-895c-47df-af8e-c160254d5cef" providerId="ADAL" clId="{067FCE3D-3D41-4548-936F-F0A348C85C95}" dt="2026-09-14T23:52:14.480" v="274" actId="20577"/>
+        <pc:chgData name="Dave Sushames" userId="ce71797e-895c-47df-af8e-c160254d5cef" providerId="ADAL" clId="{067FCE3D-3D41-4548-936F-F0A348C85C95}" dt="2026-09-15T01:42:47.420" v="781" actId="6549"/>
         <pc:sldMkLst>
           <pc:docMk/>
           <pc:sldMk cId="2360615822" sldId="262"/>
         </pc:sldMkLst>
         <pc:spChg chg="mod">
-          <ac:chgData name="Dave Sushames" userId="ce71797e-895c-47df-af8e-c160254d5cef" providerId="ADAL" clId="{067FCE3D-3D41-4548-936F-F0A348C85C95}" dt="2026-09-14T23:52:14.480" v="274" actId="20577"/>
+          <ac:chgData name="Dave Sushames" userId="ce71797e-895c-47df-af8e-c160254d5cef" providerId="ADAL" clId="{067FCE3D-3D41-4548-936F-F0A348C85C95}" dt="2026-09-15T01:38:15.347" v="694" actId="20577"/>
+          <ac:spMkLst>
+            <pc:docMk/>
+            <pc:sldMk cId="2360615822" sldId="262"/>
+            <ac:spMk id="2" creationId="{9582EF6F-E112-DB22-11E9-44E4396BFCF0}"/>
+          </ac:spMkLst>
+        </pc:spChg>
+        <pc:spChg chg="mod">
+          <ac:chgData name="Dave Sushames" userId="ce71797e-895c-47df-af8e-c160254d5cef" providerId="ADAL" clId="{067FCE3D-3D41-4548-936F-F0A348C85C95}" dt="2026-09-15T01:42:47.420" v="781" actId="6549"/>
           <ac:spMkLst>
             <pc:docMk/>
             <pc:sldMk cId="2360615822" sldId="262"/>
@@ -248,13 +296,21 @@
         </pc:spChg>
       </pc:sldChg>
       <pc:sldChg chg="modSp mod">
-        <pc:chgData name="Dave Sushames" userId="ce71797e-895c-47df-af8e-c160254d5cef" providerId="ADAL" clId="{067FCE3D-3D41-4548-936F-F0A348C85C95}" dt="2026-09-14T23:51:43.475" v="266" actId="255"/>
+        <pc:chgData name="Dave Sushames" userId="ce71797e-895c-47df-af8e-c160254d5cef" providerId="ADAL" clId="{067FCE3D-3D41-4548-936F-F0A348C85C95}" dt="2026-09-15T01:38:09.643" v="693" actId="20577"/>
         <pc:sldMkLst>
           <pc:docMk/>
           <pc:sldMk cId="2530877575" sldId="263"/>
         </pc:sldMkLst>
         <pc:spChg chg="mod">
-          <ac:chgData name="Dave Sushames" userId="ce71797e-895c-47df-af8e-c160254d5cef" providerId="ADAL" clId="{067FCE3D-3D41-4548-936F-F0A348C85C95}" dt="2026-09-14T23:51:43.475" v="266" actId="255"/>
+          <ac:chgData name="Dave Sushames" userId="ce71797e-895c-47df-af8e-c160254d5cef" providerId="ADAL" clId="{067FCE3D-3D41-4548-936F-F0A348C85C95}" dt="2026-09-15T01:38:09.643" v="693" actId="20577"/>
+          <ac:spMkLst>
+            <pc:docMk/>
+            <pc:sldMk cId="2530877575" sldId="263"/>
+            <ac:spMk id="2" creationId="{EFE07390-5D9E-D38B-8C6D-7AF59C97E173}"/>
+          </ac:spMkLst>
+        </pc:spChg>
+        <pc:spChg chg="mod">
+          <ac:chgData name="Dave Sushames" userId="ce71797e-895c-47df-af8e-c160254d5cef" providerId="ADAL" clId="{067FCE3D-3D41-4548-936F-F0A348C85C95}" dt="2026-09-15T01:13:10.415" v="277" actId="20577"/>
           <ac:spMkLst>
             <pc:docMk/>
             <pc:sldMk cId="2530877575" sldId="263"/>
@@ -263,13 +319,21 @@
         </pc:spChg>
       </pc:sldChg>
       <pc:sldChg chg="modSp mod">
-        <pc:chgData name="Dave Sushames" userId="ce71797e-895c-47df-af8e-c160254d5cef" providerId="ADAL" clId="{067FCE3D-3D41-4548-936F-F0A348C85C95}" dt="2026-09-14T23:51:23.343" v="253" actId="20577"/>
+        <pc:chgData name="Dave Sushames" userId="ce71797e-895c-47df-af8e-c160254d5cef" providerId="ADAL" clId="{067FCE3D-3D41-4548-936F-F0A348C85C95}" dt="2026-09-15T01:38:00.563" v="691" actId="20577"/>
         <pc:sldMkLst>
           <pc:docMk/>
           <pc:sldMk cId="1156493726" sldId="264"/>
         </pc:sldMkLst>
         <pc:spChg chg="mod">
-          <ac:chgData name="Dave Sushames" userId="ce71797e-895c-47df-af8e-c160254d5cef" providerId="ADAL" clId="{067FCE3D-3D41-4548-936F-F0A348C85C95}" dt="2026-09-14T23:51:23.343" v="253" actId="20577"/>
+          <ac:chgData name="Dave Sushames" userId="ce71797e-895c-47df-af8e-c160254d5cef" providerId="ADAL" clId="{067FCE3D-3D41-4548-936F-F0A348C85C95}" dt="2026-09-15T01:38:00.563" v="691" actId="20577"/>
+          <ac:spMkLst>
+            <pc:docMk/>
+            <pc:sldMk cId="1156493726" sldId="264"/>
+            <ac:spMk id="2" creationId="{2560F230-3A14-B66C-477C-5A707C1E83DD}"/>
+          </ac:spMkLst>
+        </pc:spChg>
+        <pc:spChg chg="mod">
+          <ac:chgData name="Dave Sushames" userId="ce71797e-895c-47df-af8e-c160254d5cef" providerId="ADAL" clId="{067FCE3D-3D41-4548-936F-F0A348C85C95}" dt="2026-09-15T01:28:44.689" v="532" actId="20577"/>
           <ac:spMkLst>
             <pc:docMk/>
             <pc:sldMk cId="1156493726" sldId="264"/>
@@ -278,13 +342,13 @@
         </pc:spChg>
       </pc:sldChg>
       <pc:sldChg chg="modSp mod">
-        <pc:chgData name="Dave Sushames" userId="ce71797e-895c-47df-af8e-c160254d5cef" providerId="ADAL" clId="{067FCE3D-3D41-4548-936F-F0A348C85C95}" dt="2026-09-14T23:51:53.931" v="267" actId="255"/>
+        <pc:chgData name="Dave Sushames" userId="ce71797e-895c-47df-af8e-c160254d5cef" providerId="ADAL" clId="{067FCE3D-3D41-4548-936F-F0A348C85C95}" dt="2026-09-15T01:15:55.296" v="280" actId="20577"/>
         <pc:sldMkLst>
           <pc:docMk/>
           <pc:sldMk cId="1251441915" sldId="267"/>
         </pc:sldMkLst>
         <pc:spChg chg="mod">
-          <ac:chgData name="Dave Sushames" userId="ce71797e-895c-47df-af8e-c160254d5cef" providerId="ADAL" clId="{067FCE3D-3D41-4548-936F-F0A348C85C95}" dt="2026-09-14T23:51:53.931" v="267" actId="255"/>
+          <ac:chgData name="Dave Sushames" userId="ce71797e-895c-47df-af8e-c160254d5cef" providerId="ADAL" clId="{067FCE3D-3D41-4548-936F-F0A348C85C95}" dt="2026-09-15T01:15:55.296" v="280" actId="20577"/>
           <ac:spMkLst>
             <pc:docMk/>
             <pc:sldMk cId="1251441915" sldId="267"/>
@@ -293,13 +357,13 @@
         </pc:spChg>
       </pc:sldChg>
       <pc:sldChg chg="modSp mod">
-        <pc:chgData name="Dave Sushames" userId="ce71797e-895c-47df-af8e-c160254d5cef" providerId="ADAL" clId="{067FCE3D-3D41-4548-936F-F0A348C85C95}" dt="2026-09-14T23:52:03.608" v="270" actId="20577"/>
+        <pc:chgData name="Dave Sushames" userId="ce71797e-895c-47df-af8e-c160254d5cef" providerId="ADAL" clId="{067FCE3D-3D41-4548-936F-F0A348C85C95}" dt="2026-09-15T01:17:45.568" v="283" actId="20577"/>
         <pc:sldMkLst>
           <pc:docMk/>
           <pc:sldMk cId="3959275895" sldId="268"/>
         </pc:sldMkLst>
         <pc:spChg chg="mod">
-          <ac:chgData name="Dave Sushames" userId="ce71797e-895c-47df-af8e-c160254d5cef" providerId="ADAL" clId="{067FCE3D-3D41-4548-936F-F0A348C85C95}" dt="2026-09-14T23:52:03.608" v="270" actId="20577"/>
+          <ac:chgData name="Dave Sushames" userId="ce71797e-895c-47df-af8e-c160254d5cef" providerId="ADAL" clId="{067FCE3D-3D41-4548-936F-F0A348C85C95}" dt="2026-09-15T01:17:45.568" v="283" actId="20577"/>
           <ac:spMkLst>
             <pc:docMk/>
             <pc:sldMk cId="3959275895" sldId="268"/>
@@ -9488,7 +9552,7 @@
               <a:rPr lang="en-NZ" dirty="0">
                 <a:latin typeface="Century Gothic" panose="020B0502020202020204" pitchFamily="34" charset="0"/>
               </a:rPr>
-              <a:t>Changes to timeframe.</a:t>
+              <a:t>Changes to timeframe</a:t>
             </a:r>
           </a:p>
         </p:txBody>
@@ -9528,11 +9592,41 @@
               <a:rPr lang="en-NZ" sz="1800" dirty="0">
                 <a:latin typeface="Century Gothic" panose="020B0502020202020204" pitchFamily="34" charset="0"/>
               </a:rPr>
-              <a:t>This moves the final deadline closer</a:t>
-            </a:r>
-          </a:p>
-        </p:txBody>
-      </p:sp>
+              <a:t>This results in less time to work on the project</a:t>
+            </a:r>
+          </a:p>
+        </p:txBody>
+      </p:sp>
+      <p:pic>
+        <p:nvPicPr>
+          <p:cNvPr id="7" name="Picture 6">
+            <a:extLst>
+              <a:ext uri="{FF2B5EF4-FFF2-40B4-BE49-F238E27FC236}">
+                <a16:creationId xmlns:a16="http://schemas.microsoft.com/office/drawing/2014/main" id="{257739DE-0FAB-97D0-0E34-5C4922963DA3}"/>
+              </a:ext>
+            </a:extLst>
+          </p:cNvPr>
+          <p:cNvPicPr>
+            <a:picLocks noChangeAspect="1"/>
+          </p:cNvPicPr>
+          <p:nvPr/>
+        </p:nvPicPr>
+        <p:blipFill>
+          <a:blip r:embed="rId3"/>
+          <a:stretch>
+            <a:fillRect/>
+          </a:stretch>
+        </p:blipFill>
+        <p:spPr>
+          <a:xfrm>
+            <a:off x="612647" y="2598762"/>
+            <a:ext cx="10683089" cy="3847692"/>
+          </a:xfrm>
+          <a:prstGeom prst="rect">
+            <a:avLst/>
+          </a:prstGeom>
+        </p:spPr>
+      </p:pic>
     </p:spTree>
     <p:extLst>
       <p:ext uri="{BB962C8B-B14F-4D97-AF65-F5344CB8AC3E}">
@@ -10150,7 +10244,16 @@
               <a:rPr lang="en-NZ" sz="1800" dirty="0">
                 <a:latin typeface="Century Gothic" panose="020B0502020202020204" pitchFamily="34" charset="0"/>
               </a:rPr>
-              <a:t>How progress has been made</a:t>
+              <a:t>What progress has been made</a:t>
+            </a:r>
+          </a:p>
+          <a:p>
+            <a:pPr lvl="1"/>
+            <a:r>
+              <a:rPr lang="en-NZ" sz="1800" dirty="0">
+                <a:latin typeface="Century Gothic" panose="020B0502020202020204" pitchFamily="34" charset="0"/>
+              </a:rPr>
+              <a:t>Foremost proof of concept</a:t>
             </a:r>
           </a:p>
           <a:p>
@@ -10163,15 +10266,6 @@
             </a:r>
           </a:p>
           <a:p>
-            <a:pPr lvl="1"/>
-            <a:r>
-              <a:rPr lang="en-NZ" sz="1800" dirty="0">
-                <a:latin typeface="Century Gothic" panose="020B0502020202020204" pitchFamily="34" charset="0"/>
-              </a:rPr>
-              <a:t>Foremost proof of concept</a:t>
-            </a:r>
-          </a:p>
-          <a:p>
             <a:r>
               <a:rPr lang="en-NZ" sz="1800" dirty="0">
                 <a:latin typeface="Century Gothic" panose="020B0502020202020204" pitchFamily="34" charset="0"/>
@@ -10184,7 +10278,7 @@
               <a:rPr lang="en-NZ" sz="1800" dirty="0">
                 <a:latin typeface="Century Gothic" panose="020B0502020202020204" pitchFamily="34" charset="0"/>
               </a:rPr>
-              <a:t>Any changes to timeframes that need to be discussed</a:t>
+              <a:t>Changes to timeframe</a:t>
             </a:r>
           </a:p>
           <a:p>
@@ -10252,7 +10346,7 @@
               <a:rPr lang="en-NZ" dirty="0">
                 <a:latin typeface="Century Gothic" panose="020B0502020202020204" pitchFamily="34" charset="0"/>
               </a:rPr>
-              <a:t>Brief description of project.</a:t>
+              <a:t>Brief description of project</a:t>
             </a:r>
           </a:p>
         </p:txBody>
@@ -10284,14 +10378,11 @@
               <a:buNone/>
             </a:pPr>
             <a:r>
-              <a:rPr lang="en-US" sz="1800" dirty="0">
+              <a:rPr lang="en-NZ" sz="1800" dirty="0">
                 <a:latin typeface="Century Gothic" panose="020B0502020202020204" pitchFamily="34" charset="0"/>
               </a:rPr>
-              <a:t>The project is to compare how locally-run Large Language Models (LLMs) interpret and report on Nmap, Foremost, and Wireshark outputs compared to human analysts</a:t>
-            </a:r>
-            <a:endParaRPr lang="en-NZ" sz="1800" dirty="0">
-              <a:latin typeface="Century Gothic" panose="020B0502020202020204" pitchFamily="34" charset="0"/>
-            </a:endParaRPr>
+              <a:t>The project aims to compare the interpretation and reporting ability of locally-run Large Language Models (LLMs) against the outputs produced by human analysts for three traditional forensic tools. </a:t>
+            </a:r>
           </a:p>
           <a:p>
             <a:pPr marL="0" indent="0">
@@ -10301,7 +10392,7 @@
               <a:rPr lang="en-NZ" sz="1800" dirty="0">
                 <a:latin typeface="Century Gothic" panose="020B0502020202020204" pitchFamily="34" charset="0"/>
               </a:rPr>
-              <a:t>This project investigates the efficacy of the report output as generated by a human compared to an AI enhanced tool.</a:t>
+              <a:t>The tools that have been chosen for this project are Nmap, Foremost and Wireshark, with the intention of being able to test the strengths and weaknesses of the produced reports across a varied range of tools that touch on multiple different areas of Digital Forensics.</a:t>
             </a:r>
           </a:p>
         </p:txBody>
@@ -10363,7 +10454,7 @@
               <a:rPr lang="en-NZ" dirty="0">
                 <a:latin typeface="Century Gothic" panose="020B0502020202020204" pitchFamily="34" charset="0"/>
               </a:rPr>
-              <a:t>Milestones and deliverables that have been completed.</a:t>
+              <a:t>Milestones and deliverables that have been completed</a:t>
             </a:r>
           </a:p>
         </p:txBody>
@@ -10425,7 +10516,7 @@
               <a:rPr lang="en-NZ" sz="1800" dirty="0">
                 <a:latin typeface="Century Gothic" panose="020B0502020202020204" pitchFamily="34" charset="0"/>
               </a:rPr>
-              <a:t>Tested and selected AI model: Gemma4:26b</a:t>
+              <a:t>Tested and selected LLM model: Gemma4:26b</a:t>
             </a:r>
           </a:p>
           <a:p>
@@ -10433,7 +10524,7 @@
               <a:rPr lang="en-NZ" sz="1800" dirty="0">
                 <a:latin typeface="Century Gothic" panose="020B0502020202020204" pitchFamily="34" charset="0"/>
               </a:rPr>
-              <a:t>AI Foremost integration: </a:t>
+              <a:t>LLM Foremost integration: </a:t>
             </a:r>
           </a:p>
           <a:p>
@@ -10502,7 +10593,7 @@
               <a:rPr lang="en-NZ" dirty="0">
                 <a:latin typeface="Century Gothic" panose="020B0502020202020204" pitchFamily="34" charset="0"/>
               </a:rPr>
-              <a:t>How progress has been made.</a:t>
+              <a:t>What progress has been made</a:t>
             </a:r>
           </a:p>
         </p:txBody>
@@ -10547,7 +10638,7 @@
               <a:rPr lang="en-NZ" sz="1800" dirty="0">
                 <a:latin typeface="Century Gothic" panose="020B0502020202020204" pitchFamily="34" charset="0"/>
               </a:rPr>
-              <a:t>Tool scope was refine</a:t>
+              <a:t>Tool scope was refined</a:t>
             </a:r>
           </a:p>
           <a:p>
@@ -10733,7 +10824,7 @@
               <a:rPr lang="en-US" sz="1800" dirty="0">
                 <a:latin typeface="Century Gothic" panose="020B0502020202020204" pitchFamily="34" charset="0"/>
               </a:rPr>
-              <a:t>This effort represents the successful development/integration of AI enhancement to a digital forensics tool</a:t>
+              <a:t>This effort represents the successful development/integration of LLM enhancement to a digital forensics tool</a:t>
             </a:r>
           </a:p>
           <a:p>
@@ -10886,7 +10977,7 @@
               <a:rPr lang="en-US" sz="1800" dirty="0">
                 <a:latin typeface="Century Gothic" panose="020B0502020202020204" pitchFamily="34" charset="0"/>
               </a:rPr>
-              <a:t> prompt.</a:t>
+              <a:t> prompt</a:t>
             </a:r>
           </a:p>
           <a:p>
@@ -10912,7 +11003,7 @@
               <a:rPr lang="en-US" sz="1800" dirty="0">
                 <a:latin typeface="Century Gothic" panose="020B0502020202020204" pitchFamily="34" charset="0"/>
               </a:rPr>
-              <a:t>Vision models inspecting digital images have trouble reading small text. LLMs hallucinate and fabricate false information even with strict prompting, LLMs seem to have trouble asserting ignorance</a:t>
+              <a:t>Vision models inspecting digital images have trouble reading small text. LLMs hallucinate and fabricate false information even with strict prompting. LLMs seem to have trouble asserting ignorance</a:t>
             </a:r>
           </a:p>
         </p:txBody>
@@ -10972,7 +11063,7 @@
               <a:rPr lang="en-NZ" dirty="0">
                 <a:latin typeface="Century Gothic" panose="020B0502020202020204" pitchFamily="34" charset="0"/>
               </a:rPr>
-              <a:t>What is still to be done.</a:t>
+              <a:t>What is still to be done</a:t>
             </a:r>
           </a:p>
         </p:txBody>
@@ -11004,7 +11095,7 @@
               <a:rPr lang="en-NZ" sz="1800" dirty="0">
                 <a:latin typeface="Century Gothic" panose="020B0502020202020204" pitchFamily="34" charset="0"/>
               </a:rPr>
-              <a:t>Complete Wireshark and Nmap evaluation</a:t>
+              <a:t>Complete Wireshark and Nmap evaluation and integration</a:t>
             </a:r>
           </a:p>
           <a:p>
@@ -11012,7 +11103,7 @@
               <a:rPr lang="en-US" sz="1800" dirty="0">
                 <a:latin typeface="Century Gothic" panose="020B0502020202020204" pitchFamily="34" charset="0"/>
               </a:rPr>
-              <a:t>Finalize test metrics</a:t>
+              <a:t>Finalize test metrics and cases</a:t>
             </a:r>
           </a:p>
           <a:p>
@@ -11020,7 +11111,7 @@
               <a:rPr lang="en-US" sz="1800" dirty="0">
                 <a:latin typeface="Century Gothic" panose="020B0502020202020204" pitchFamily="34" charset="0"/>
               </a:rPr>
-              <a:t>Nmap and Wireshark integration</a:t>
+              <a:t>Perform testing</a:t>
             </a:r>
           </a:p>
           <a:p>
@@ -11028,7 +11119,7 @@
               <a:rPr lang="en-US" sz="1800" dirty="0">
                 <a:latin typeface="Century Gothic" panose="020B0502020202020204" pitchFamily="34" charset="0"/>
               </a:rPr>
-              <a:t>Run tests</a:t>
+              <a:t>Consolidate findings into report</a:t>
             </a:r>
           </a:p>
           <a:p>
@@ -11036,15 +11127,7 @@
               <a:rPr lang="en-US" sz="1800" dirty="0">
                 <a:latin typeface="Century Gothic" panose="020B0502020202020204" pitchFamily="34" charset="0"/>
               </a:rPr>
-              <a:t>Consolidate findings</a:t>
-            </a:r>
-          </a:p>
-          <a:p>
-            <a:r>
-              <a:rPr lang="en-US" sz="1800" dirty="0">
-                <a:latin typeface="Century Gothic" panose="020B0502020202020204" pitchFamily="34" charset="0"/>
-              </a:rPr>
-              <a:t>Final report deliverable</a:t>
+              <a:t>Deliver final report</a:t>
             </a:r>
           </a:p>
         </p:txBody>
